--- a/curso/pptx/S74.pptx
+++ b/curso/pptx/S74.pptx
@@ -5227,7 +5227,7 @@
                 </a:solidFill>
                 <a:latin typeface="Nunito Sans"/>
               </a:rPr>
-              <a:t>Mide cómo </a:t>
+              <a:t>它衡量的是我们怎么</a:t>
             </a:r>
             <a:r>
               <a:rPr sz="2800" b="1">
@@ -5236,7 +5236,7 @@
                 </a:solidFill>
                 <a:latin typeface="Nunito Sans"/>
               </a:rPr>
-              <a:t>razonamos</a:t>
+              <a:t>思考</a:t>
             </a:r>
             <a:r>
               <a:rPr sz="2800" b="0">
@@ -5245,7 +5245,7 @@
                 </a:solidFill>
                 <a:latin typeface="Nunito Sans"/>
               </a:rPr>
-              <a:t>, no siempre cómo </a:t>
+              <a:t>，不总是我们怎么</a:t>
             </a:r>
             <a:r>
               <a:rPr sz="2800" b="1">
@@ -5254,7 +5254,7 @@
                 </a:solidFill>
                 <a:latin typeface="Nunito Sans"/>
               </a:rPr>
-              <a:t>actuamos</a:t>
+              <a:t>行动</a:t>
             </a:r>
           </a:p>
           <a:p>
@@ -5279,7 +5279,7 @@
                 </a:solidFill>
                 <a:latin typeface="Nunito Sans"/>
               </a:rPr>
-              <a:t>Según Kohlberg, muchos adultos no llegan al nivel 3</a:t>
+              <a:t>按科尔伯格的说法，许多成年人到不了水平3</a:t>
             </a:r>
           </a:p>
           <a:p>
@@ -5304,7 +5304,7 @@
                 </a:solidFill>
                 <a:latin typeface="Nunito Sans"/>
               </a:rPr>
-              <a:t>Al principio estudió solo a chicos, y de un solo país</a:t>
+              <a:t>一开始他只研究男孩，而且只来自一个国家</a:t>
             </a:r>
           </a:p>
           <a:p>
@@ -5329,7 +5329,7 @@
                 </a:solidFill>
                 <a:latin typeface="Nunito Sans"/>
               </a:rPr>
-              <a:t>Otros críticos dicen que refleja sobre todo valores occidentales</a:t>
+              <a:t>另一些批评者说，它主要反映的是西方的价值观</a:t>
             </a:r>
           </a:p>
         </p:txBody>
@@ -5563,7 +5563,7 @@
                 </a:solidFill>
                 <a:latin typeface="Nunito Sans"/>
               </a:rPr>
-              <a:t>La propuso la psicóloga </a:t>
+              <a:t>由心理学家</a:t>
             </a:r>
             <a:r>
               <a:rPr sz="2800" b="1">
@@ -5572,7 +5572,7 @@
                 </a:solidFill>
                 <a:latin typeface="Nunito Sans"/>
               </a:rPr>
-              <a:t>Carol Gilligan</a:t>
+              <a:t>卡罗尔·吉利根</a:t>
             </a:r>
             <a:r>
               <a:rPr sz="2800" b="0">
@@ -5581,7 +5581,7 @@
                 </a:solidFill>
                 <a:latin typeface="Nunito Sans"/>
               </a:rPr>
-              <a:t> en 1982</a:t>
+              <a:t>于1982年提出</a:t>
             </a:r>
           </a:p>
           <a:p>
@@ -5606,7 +5606,7 @@
                 </a:solidFill>
                 <a:latin typeface="Nunito Sans"/>
               </a:rPr>
-              <a:t>Criticó que Kohlberg estudiara al principio </a:t>
+              <a:t>她批评科尔伯格一开始</a:t>
             </a:r>
             <a:r>
               <a:rPr sz="2800" b="1">
@@ -5615,7 +5615,7 @@
                 </a:solidFill>
                 <a:latin typeface="Nunito Sans"/>
               </a:rPr>
-              <a:t>solo a chicos</a:t>
+              <a:t>只研究男孩</a:t>
             </a:r>
           </a:p>
           <a:p>
@@ -5640,7 +5640,7 @@
                 </a:solidFill>
                 <a:latin typeface="Nunito Sans"/>
               </a:rPr>
-              <a:t>Estudios posteriores: las diferencias entre chicos y chicas son </a:t>
+              <a:t>后来的研究：男孩和女孩之间的差异</a:t>
             </a:r>
             <a:r>
               <a:rPr sz="2800" b="1">
@@ -5649,7 +5649,7 @@
                 </a:solidFill>
                 <a:latin typeface="Nunito Sans"/>
               </a:rPr>
-              <a:t>pequeñas</a:t>
+              <a:t>很小</a:t>
             </a:r>
           </a:p>
           <a:p>
@@ -5674,7 +5674,7 @@
                 </a:solidFill>
                 <a:latin typeface="Nunito Sans"/>
               </a:rPr>
-              <a:t>Muchos ven hoy la justicia y el cuidado como complementarios</a:t>
+              <a:t>今天许多人把公正和关怀看作是互补的</a:t>
             </a:r>
           </a:p>
         </p:txBody>
@@ -7434,7 +7434,7 @@
                 </a:solidFill>
                 <a:latin typeface="Nunito Sans"/>
               </a:rPr>
-              <a:t>Físico:</a:t>
+              <a:t>身体方面：</a:t>
             </a:r>
             <a:r>
               <a:rPr sz="2800" b="0">
@@ -7443,7 +7443,7 @@
                 </a:solidFill>
                 <a:latin typeface="Nunito Sans"/>
               </a:rPr>
-              <a:t> el cuerpo crece y cambia, sobre todo en la adolescencia</a:t>
+              <a:t>身体在长大、在变化，尤其是在青春期</a:t>
             </a:r>
           </a:p>
           <a:p>
@@ -7468,7 +7468,7 @@
                 </a:solidFill>
                 <a:latin typeface="Nunito Sans"/>
               </a:rPr>
-              <a:t>Cognitivo:</a:t>
+              <a:t>认知方面：</a:t>
             </a:r>
             <a:r>
               <a:rPr sz="2800" b="0">
@@ -7477,7 +7477,7 @@
                 </a:solidFill>
                 <a:latin typeface="Nunito Sans"/>
               </a:rPr>
-              <a:t> pensamos mejor sobre ideas, no solo sobre cosas</a:t>
+              <a:t>我们能更好地思考观念，而不只是思考事物</a:t>
             </a:r>
           </a:p>
           <a:p>
@@ -7502,7 +7502,7 @@
                 </a:solidFill>
                 <a:latin typeface="Nunito Sans"/>
               </a:rPr>
-              <a:t>Personal:</a:t>
+              <a:t>个人方面：</a:t>
             </a:r>
             <a:r>
               <a:rPr sz="2800" b="0">
@@ -7511,7 +7511,7 @@
                 </a:solidFill>
                 <a:latin typeface="Nunito Sans"/>
               </a:rPr>
-              <a:t> cambian los gustos, los amigos, la forma de ser</a:t>
+              <a:t>爱好、朋友、性格都在变化</a:t>
             </a:r>
           </a:p>
           <a:p>
@@ -7536,7 +7536,7 @@
                 </a:solidFill>
                 <a:latin typeface="Nunito Sans"/>
               </a:rPr>
-              <a:t>Moral:</a:t>
+              <a:t>道德方面：</a:t>
             </a:r>
             <a:r>
               <a:rPr sz="2800" b="0">
@@ -7545,7 +7545,7 @@
                 </a:solidFill>
                 <a:latin typeface="Nunito Sans"/>
               </a:rPr>
-              <a:t> cambia cómo razonamos sobre el bien y el mal</a:t>
+              <a:t>我们思考善与恶的方式在变化</a:t>
             </a:r>
           </a:p>
         </p:txBody>
@@ -7797,7 +7797,7 @@
                 </a:solidFill>
                 <a:latin typeface="Nunito Sans"/>
               </a:rPr>
-              <a:t>Su dilema más famoso: el de </a:t>
+              <a:t>他最有名的两难：</a:t>
             </a:r>
             <a:r>
               <a:rPr sz="2800" b="1">
@@ -7806,7 +7806,16 @@
                 </a:solidFill>
                 <a:latin typeface="Nunito Sans"/>
               </a:rPr>
-              <a:t>Heinz</a:t>
+              <a:t>海因茨</a:t>
+            </a:r>
+            <a:r>
+              <a:rPr sz="2800" b="0">
+                <a:solidFill>
+                  <a:srgbClr val="1F2A44"/>
+                </a:solidFill>
+                <a:latin typeface="Nunito Sans"/>
+              </a:rPr>
+              <a:t>的两难</a:t>
             </a:r>
           </a:p>
           <a:p>
@@ -7831,7 +7840,7 @@
                 </a:solidFill>
                 <a:latin typeface="Nunito Sans"/>
               </a:rPr>
-              <a:t>Le importaban las </a:t>
+              <a:t>他关心的是</a:t>
             </a:r>
             <a:r>
               <a:rPr sz="2800" b="1">
@@ -7840,7 +7849,7 @@
                 </a:solidFill>
                 <a:latin typeface="Nunito Sans"/>
               </a:rPr>
-              <a:t>razones</a:t>
+              <a:t>理由</a:t>
             </a:r>
             <a:r>
               <a:rPr sz="2800" b="0">
@@ -7849,7 +7858,7 @@
                 </a:solidFill>
                 <a:latin typeface="Nunito Sans"/>
               </a:rPr>
-              <a:t>, no la respuesta</a:t>
+              <a:t>，而不是答案</a:t>
             </a:r>
           </a:p>
           <a:p>
@@ -7874,7 +7883,7 @@
                 </a:solidFill>
                 <a:latin typeface="Nunito Sans"/>
               </a:rPr>
-              <a:t>Propuso </a:t>
+              <a:t>他提出了</a:t>
             </a:r>
             <a:r>
               <a:rPr sz="2800" b="1">
@@ -7883,7 +7892,7 @@
                 </a:solidFill>
                 <a:latin typeface="Nunito Sans"/>
               </a:rPr>
-              <a:t>tres niveles</a:t>
+              <a:t>三个水平</a:t>
             </a:r>
             <a:r>
               <a:rPr sz="2800" b="0">
@@ -7892,7 +7901,7 @@
                 </a:solidFill>
                 <a:latin typeface="Nunito Sans"/>
               </a:rPr>
-              <a:t>, con dos etapas cada uno</a:t>
+              <a:t>，每个水平有两个阶段</a:t>
             </a:r>
           </a:p>
         </p:txBody>

--- a/curso/pptx/S74.pptx
+++ b/curso/pptx/S74.pptx
@@ -4130,7 +4130,7 @@
                 </a:solidFill>
                 <a:latin typeface="Nunito Sans"/>
               </a:rPr>
-              <a:t>奥马尔不踢足球改画画了，现在和另一个朋友圈在一起。一个朋友对他说：“你变了。你已经不是你了。”（编造的例子。）</a:t>
+              <a:t>一个男孩不踢足球改画画了，现在和另一个朋友圈在一起。一个朋友对他说：“你变了。你已经不是你了。”（编造的例子。）</a:t>
             </a:r>
           </a:p>
         </p:txBody>
@@ -4178,7 +4178,7 @@
                 </a:solidFill>
                 <a:latin typeface="Nunito Sans"/>
               </a:rPr>
-              <a:t>奥马尔确实变了：爱好和朋友。</a:t>
+              <a:t>这个男孩确实变了：爱好和朋友。</a:t>
             </a:r>
           </a:p>
           <a:p>
@@ -4766,7 +4766,7 @@
                 </a:solidFill>
                 <a:latin typeface="Nunito Sans"/>
               </a:rPr>
-              <a:t>面对海因茨的两难，艾托尔回答说海因茨应该偷药。奈亚拉回答说他不该偷。</a:t>
+              <a:t>面对海因茨的两难，一个男孩回答说海因茨应该偷药。一个女孩回答说他不该偷。</a:t>
             </a:r>
           </a:p>
         </p:txBody>
@@ -4814,7 +4814,7 @@
                 </a:solidFill>
                 <a:latin typeface="Nunito Sans"/>
               </a:rPr>
-              <a:t>想救一条生命的艾托尔，是在更高的水平上思考吗？</a:t>
+              <a:t>想救一条生命的这个男孩，是在更高的水平上思考吗？</a:t>
             </a:r>
           </a:p>
           <a:p>
@@ -4864,7 +4864,7 @@
                 </a:solidFill>
                 <a:latin typeface="Nunito Sans"/>
               </a:rPr>
-              <a:t>但是艾托尔解释说：“他应该偷，因为如果她死了，他就剩下一个人了。”他只看对自己有利的：水平1。</a:t>
+              <a:t>但是这个男孩解释说：“他应该偷，因为如果她死了，他就剩下一个人了。”他只看对自己有利的：水平1。</a:t>
             </a:r>
           </a:p>
           <a:p>
@@ -4889,7 +4889,7 @@
                 </a:solidFill>
                 <a:latin typeface="Nunito Sans"/>
               </a:rPr>
-              <a:t>奈亚拉解释说：“不，因为法律对每个人都一样。”她想的是规范：水平2。</a:t>
+              <a:t>这个女孩解释说：“不，因为法律对每个人都一样。”她想的是规范：水平2。</a:t>
             </a:r>
           </a:p>
           <a:p>
